--- a/public/fun/pack/pptx/birthdaypro/돌잔치프리미엄_31_성장기록중심_머스터드네이비.pptx
+++ b/public/fun/pack/pptx/birthdaypro/돌잔치프리미엄_31_성장기록중심_머스터드네이비.pptx
@@ -112,12 +112,12 @@
   <p:extLst>
     <p:ext uri="{521415D9-36F7-43E2-AB2F-B90AF26B5E84}">
       <p14:sectionLst xmlns:p14="http://schemas.microsoft.com/office/powerpoint/2010/main">
-        <p14:section name="시작" id="{797720C9-62AF-49D4-8911-AA9461E6A62C}">
+        <p14:section name="시작" id="{4D3A6EA6-FDAF-4E3D-A3C9-2A22CAD7A213}">
           <p14:sldIdLst>
             <p14:sldId id="256"/>
           </p14:sldIdLst>
         </p14:section>
-        <p14:section name="본문" id="{B921BCEB-AA5F-44F3-A279-CF121A07C2BC}">
+        <p14:section name="본문" id="{7F0FE3A5-771A-40D4-A418-56973EA36FFC}">
           <p14:sldIdLst>
             <p14:sldId id="257"/>
             <p14:sldId id="258"/>
@@ -125,7 +125,7 @@
             <p14:sldId id="260"/>
           </p14:sldIdLst>
         </p14:section>
-        <p14:section name="마무리" id="{9D7F6082-20CD-440C-B0D0-B1293E91CB77}">
+        <p14:section name="마무리" id="{00EEA2B3-D2C7-44C5-8D32-1DBF7B30EE2F}">
           <p14:sldIdLst>
             <p14:sldId id="261"/>
           </p14:sldIdLst>
@@ -1611,7 +1611,7 @@
             </a:lvl1pPr>
           </a:lstStyle>
           <a:p>
-            <a:fld id="{9E44F8CD-4D25-4486-85DC-B513E8E38C55}" type="slidenum">
+            <a:fld id="{A9758D32-D15B-46E7-BF81-AD49838C1A64}" type="slidenum">
               <a:rPr lang="en-US"/>
               <a:t>‹#›</a:t>
             </a:fld>
@@ -2332,7 +2332,7 @@
             </a:lvl1pPr>
           </a:lstStyle>
           <a:p>
-            <a:fld id="{A5EAD95C-6CC9-476A-B62F-6A5627CC0C9A}" type="slidenum">
+            <a:fld id="{30A20A78-5599-49D3-B2E1-A37C6308D93F}" type="slidenum">
               <a:rPr lang="en-US"/>
               <a:t>‹#›</a:t>
             </a:fld>
@@ -3081,7 +3081,7 @@
             </a:lvl1pPr>
           </a:lstStyle>
           <a:p>
-            <a:fld id="{B6892E46-C9E6-4F8A-A13A-9594AFC45528}" type="slidenum">
+            <a:fld id="{039CC1B3-7967-49BC-AD80-019D26641A45}" type="slidenum">
               <a:rPr lang="en-US"/>
               <a:t>‹#›</a:t>
             </a:fld>
@@ -3988,7 +3988,7 @@
           <a:p>
             <a:r>
               <a:rPr lang="ko-KR"/>
-              <a:t>아기 이름 · 0000. 00. 00</a:t>
+              <a:t>아기 이름 · 날짜 입력</a:t>
             </a:r>
           </a:p>
           <a:p>
@@ -4171,7 +4171,7 @@
           <a:bodyPr/>
           <a:lstStyle/>
           <a:p>
-            <a:fld id="{E0FCF6EC-12A1-421A-A882-A024F7F677FD}" type="slidenum">
+            <a:fld id="{AE663EF4-0E09-4E0A-BA4C-55A96F699105}" type="slidenum">
               <a:rPr lang="en-US"/>
               <a:t>‹#›</a:t>
             </a:fld>
@@ -4793,7 +4793,7 @@
           <a:bodyPr/>
           <a:lstStyle/>
           <a:p>
-            <a:fld id="{03E7CC7C-F154-4B94-9C4F-87797299F621}" type="slidenum">
+            <a:fld id="{7C228D11-3448-43B8-B41E-642A08735EA5}" type="slidenum">
               <a:rPr lang="en-US"/>
               <a:t>‹#›</a:t>
             </a:fld>
@@ -5996,7 +5996,7 @@
           <a:bodyPr/>
           <a:lstStyle/>
           <a:p>
-            <a:fld id="{9FA8E28D-3CD1-4EE4-A787-8FA9C7055356}" type="slidenum">
+            <a:fld id="{8678C27D-A4E7-420B-BBCE-44D354D5E89E}" type="slidenum">
               <a:rPr lang="en-US"/>
               <a:t>‹#›</a:t>
             </a:fld>
@@ -6693,7 +6693,7 @@
           <a:bodyPr/>
           <a:lstStyle/>
           <a:p>
-            <a:fld id="{54A4AFEC-687D-481B-92D4-EC6BE9F1CFF1}" type="slidenum">
+            <a:fld id="{95CD4B79-DE18-473B-9CDE-0FB9D3CF8D4A}" type="slidenum">
               <a:rPr lang="en-US"/>
               <a:t>‹#›</a:t>
             </a:fld>
